--- a/content/decks/a-level-art-design/9479-s1-a4-the-final-portfolio.pptx
+++ b/content/decks/a-level-art-design/9479-s1-a4-the-final-portfolio.pptx
@@ -4100,7 +4100,7 @@
       </p:grpSpPr>
       <p:pic>
         <p:nvPicPr>
-          <p:cNvPr id="2" name="Image 0" descr="/private/tmp/claude-501/-Users-dogan-Documents-Vaults-Courses/3954bcc8-cc8d-4110-bd5a-74962061a805/scratchpad/decks/img/crops/talbot-articles-of-glass_a1777.jpg">    </p:cNvPr>
+          <p:cNvPr id="2" name="Image 0" descr="/Users/dogan/Documents/Vaults/Courses/wiki/classes/a-level-art-design/decks/_build/img/crops/talbot-articles-of-glass_a1777.jpg">    </p:cNvPr>
           <p:cNvPicPr>
             <a:picLocks noChangeAspect="1"/>
           </p:cNvPicPr>
@@ -4921,7 +4921,7 @@
       </p:grpSpPr>
       <p:pic>
         <p:nvPicPr>
-          <p:cNvPr id="2" name="Image 0" descr="/private/tmp/claude-501/-Users-dogan-Documents-Vaults-Courses/3954bcc8-cc8d-4110-bd5a-74962061a805/scratchpad/decks/img/crops/mucha-cherry-blossom_a691.jpg">    </p:cNvPr>
+          <p:cNvPr id="2" name="Image 0" descr="/Users/dogan/Documents/Vaults/Courses/wiki/classes/a-level-art-design/decks/_build/img/crops/mucha-cherry-blossom_a691.jpg">    </p:cNvPr>
           <p:cNvPicPr>
             <a:picLocks noChangeAspect="1"/>
           </p:cNvPicPr>
@@ -5524,7 +5524,7 @@
       </p:sp>
       <p:pic>
         <p:nvPicPr>
-          <p:cNvPr id="7" name="Image 0" descr="/private/tmp/claude-501/-Users-dogan-Documents-Vaults-Courses/3954bcc8-cc8d-4110-bd5a-74962061a805/scratchpad/decks/img/repin-tolstoy.jpg">    </p:cNvPr>
+          <p:cNvPr id="7" name="Image 0" descr="/Users/dogan/Documents/Vaults/Courses/wiki/classes/a-level-art-design/decks/_build/img/repin-tolstoy.jpg">    </p:cNvPr>
           <p:cNvPicPr>
             <a:picLocks noChangeAspect="1"/>
           </p:cNvPicPr>
@@ -5651,7 +5651,7 @@
       </p:sp>
       <p:pic>
         <p:nvPicPr>
-          <p:cNvPr id="11" name="Image 1" descr="/private/tmp/claude-501/-Users-dogan-Documents-Vaults-Courses/3954bcc8-cc8d-4110-bd5a-74962061a805/scratchpad/decks/img/rubens-sheet-forearm.jpg">    </p:cNvPr>
+          <p:cNvPr id="11" name="Image 1" descr="/Users/dogan/Documents/Vaults/Courses/wiki/classes/a-level-art-design/decks/_build/img/rubens-sheet-forearm.jpg">    </p:cNvPr>
           <p:cNvPicPr>
             <a:picLocks noChangeAspect="1"/>
           </p:cNvPicPr>
@@ -5745,7 +5745,7 @@
                 <a:ea typeface="Georgia" pitchFamily="34" charset="-122"/>
                 <a:cs typeface="Georgia" pitchFamily="34" charset="-120"/>
               </a:rPr>
-              <a:t>Sequence the whole journey</a:t>
+              <a:t>Sequence the whole journey, then cut</a:t>
             </a:r>
             <a:endParaRPr lang="en-US" sz="1400" dirty="0"/>
           </a:p>
@@ -5778,7 +5778,7 @@
       </p:sp>
       <p:pic>
         <p:nvPicPr>
-          <p:cNvPr id="15" name="Image 2" descr="/private/tmp/claude-501/-Users-dogan-Documents-Vaults-Courses/3954bcc8-cc8d-4110-bd5a-74962061a805/scratchpad/decks/img/bosschaert-bouquet.jpg">    </p:cNvPr>
+          <p:cNvPr id="15" name="Image 2" descr="/Users/dogan/Documents/Vaults/Courses/wiki/classes/a-level-art-design/decks/_build/img/bosschaert-bouquet.jpg">    </p:cNvPr>
           <p:cNvPicPr>
             <a:picLocks noChangeAspect="1"/>
           </p:cNvPicPr>
@@ -5833,7 +5833,7 @@
                 <a:ea typeface="Arial" pitchFamily="34" charset="-122"/>
                 <a:cs typeface="Arial" pitchFamily="34" charset="-120"/>
               </a:rPr>
-              <a:t>Wednesday</a:t>
+              <a:t>Tuesday night</a:t>
             </a:r>
             <a:endParaRPr lang="en-US" sz="1250" dirty="0"/>
           </a:p>
@@ -5872,7 +5872,7 @@
                 <a:ea typeface="Georgia" pitchFamily="34" charset="-122"/>
                 <a:cs typeface="Georgia" pitchFamily="34" charset="-120"/>
               </a:rPr>
-              <a:t>Cut, then check every AO</a:t>
+              <a:t>The AO check at home, in writing, signed</a:t>
             </a:r>
             <a:endParaRPr lang="en-US" sz="1400" dirty="0"/>
           </a:p>
